--- a/Goodness of God.pptx
+++ b/Goodness of God.pptx
@@ -5,8 +5,8 @@
     <p:sldMasterId id="2147483660" r:id="rId1"/>
   </p:sldMasterIdLst>
   <p:sldIdLst>
-    <p:sldId id="261" r:id="rId2"/>
-    <p:sldId id="275" r:id="rId3"/>
+    <p:sldId id="275" r:id="rId2"/>
+    <p:sldId id="289" r:id="rId3"/>
     <p:sldId id="281" r:id="rId4"/>
     <p:sldId id="282" r:id="rId5"/>
     <p:sldId id="265" r:id="rId6"/>
@@ -2974,7 +2974,7 @@
     <p:bg>
       <p:bgPr>
         <a:solidFill>
-          <a:schemeClr val="bg1"/>
+          <a:schemeClr val="tx1"/>
         </a:solidFill>
         <a:effectLst/>
       </p:bgPr>
@@ -2984,7 +2984,7 @@
         <p:cNvPr id="1" name="">
           <a:extLst>
             <a:ext uri="{FF2B5EF4-FFF2-40B4-BE49-F238E27FC236}">
-              <a16:creationId xmlns:a16="http://schemas.microsoft.com/office/drawing/2014/main" id="{43ACF013-4574-2AD0-7BFD-6E771B7E5C0B}"/>
+              <a16:creationId xmlns:a16="http://schemas.microsoft.com/office/drawing/2014/main" id="{083E1F97-17F4-001F-7673-B8EFA09D831D}"/>
             </a:ext>
           </a:extLst>
         </p:cNvPr>
@@ -2999,405 +2999,52 @@
           <a:chExt cx="0" cy="0"/>
         </a:xfrm>
       </p:grpSpPr>
-      <p:sp useBgFill="1">
-        <p:nvSpPr>
-          <p:cNvPr id="9" name="Rectangle 8">
+      <p:sp>
+        <p:nvSpPr>
+          <p:cNvPr id="3" name="Subtitle 2">
             <a:extLst>
               <a:ext uri="{FF2B5EF4-FFF2-40B4-BE49-F238E27FC236}">
-                <a16:creationId xmlns:a16="http://schemas.microsoft.com/office/drawing/2014/main" id="{0671A8AE-40A1-4631-A6B8-581AFF065482}"/>
-              </a:ext>
-              <a:ext uri="{C183D7F6-B498-43B3-948B-1728B52AA6E4}">
-                <adec:decorative xmlns:adec="http://schemas.microsoft.com/office/drawing/2017/decorative" val="1"/>
+                <a16:creationId xmlns:a16="http://schemas.microsoft.com/office/drawing/2014/main" id="{0F0AA937-867D-D484-37E8-C9B43A905917}"/>
               </a:ext>
             </a:extLst>
           </p:cNvPr>
           <p:cNvSpPr>
-            <a:spLocks noGrp="1" noRot="1" noChangeAspect="1" noMove="1" noResize="1" noEditPoints="1" noAdjustHandles="1" noChangeArrowheads="1" noChangeShapeType="1" noTextEdit="1"/>
-          </p:cNvSpPr>
-          <p:nvPr>
-            <p:extLst>
-              <p:ext uri="{386F3935-93C4-4BCD-93E2-E3B085C9AB24}">
-                <p16:designElem xmlns:p16="http://schemas.microsoft.com/office/powerpoint/2015/main" val="1"/>
-              </p:ext>
-            </p:extLst>
+            <a:spLocks noGrp="1"/>
+          </p:cNvSpPr>
+          <p:nvPr>
+            <p:ph type="subTitle" idx="1"/>
           </p:nvPr>
         </p:nvSpPr>
         <p:spPr>
           <a:xfrm>
-            <a:off x="0" y="0"/>
-            <a:ext cx="9144000" cy="6858000"/>
-          </a:xfrm>
-          <a:prstGeom prst="rect">
-            <a:avLst/>
-          </a:prstGeom>
-          <a:ln>
-            <a:noFill/>
-          </a:ln>
-        </p:spPr>
-        <p:style>
-          <a:lnRef idx="2">
-            <a:schemeClr val="accent1">
-              <a:shade val="50000"/>
-            </a:schemeClr>
-          </a:lnRef>
-          <a:fillRef idx="1">
-            <a:schemeClr val="accent1"/>
-          </a:fillRef>
-          <a:effectRef idx="0">
-            <a:schemeClr val="accent1"/>
-          </a:effectRef>
-          <a:fontRef idx="minor">
-            <a:schemeClr val="lt1"/>
-          </a:fontRef>
-        </p:style>
-        <p:txBody>
-          <a:bodyPr rtlCol="0" anchor="ctr"/>
-          <a:lstStyle/>
-          <a:p>
-            <a:pPr algn="ctr"/>
-            <a:endParaRPr lang="en-US"/>
-          </a:p>
-        </p:txBody>
-      </p:sp>
-      <p:pic>
-        <p:nvPicPr>
-          <p:cNvPr id="4" name="Picture 3" descr="Matterhorn with snow and stars in the sky&#10;&#10;AI-generated content may be incorrect.">
-            <a:extLst>
-              <a:ext uri="{FF2B5EF4-FFF2-40B4-BE49-F238E27FC236}">
-                <a16:creationId xmlns:a16="http://schemas.microsoft.com/office/drawing/2014/main" id="{20FF3D56-E105-8F19-A54E-4F173C83BFB7}"/>
-              </a:ext>
-            </a:extLst>
-          </p:cNvPr>
-          <p:cNvPicPr>
-            <a:picLocks noChangeAspect="1"/>
-          </p:cNvPicPr>
-          <p:nvPr/>
-        </p:nvPicPr>
-        <p:blipFill>
-          <a:blip r:embed="rId2"/>
-          <a:srcRect l="20653" t="9091" r="30869"/>
-          <a:stretch>
-            <a:fillRect/>
-          </a:stretch>
-        </p:blipFill>
-        <p:spPr>
-          <a:xfrm>
-            <a:off x="2642616" y="10"/>
-            <a:ext cx="6501384" cy="6857990"/>
-          </a:xfrm>
-          <a:prstGeom prst="rect">
-            <a:avLst/>
-          </a:prstGeom>
-        </p:spPr>
-      </p:pic>
-      <p:sp>
-        <p:nvSpPr>
-          <p:cNvPr id="11" name="Rectangle 10">
-            <a:extLst>
-              <a:ext uri="{FF2B5EF4-FFF2-40B4-BE49-F238E27FC236}">
-                <a16:creationId xmlns:a16="http://schemas.microsoft.com/office/drawing/2014/main" id="{AB58EF07-17C2-48CF-ABB0-EEF1F17CB8F0}"/>
-              </a:ext>
-              <a:ext uri="{C183D7F6-B498-43B3-948B-1728B52AA6E4}">
-                <adec:decorative xmlns:adec="http://schemas.microsoft.com/office/drawing/2017/decorative" val="1"/>
-              </a:ext>
-            </a:extLst>
-          </p:cNvPr>
-          <p:cNvSpPr>
-            <a:spLocks noGrp="1" noRot="1" noChangeAspect="1" noMove="1" noResize="1" noEditPoints="1" noAdjustHandles="1" noChangeArrowheads="1" noChangeShapeType="1" noTextEdit="1"/>
-          </p:cNvSpPr>
-          <p:nvPr>
-            <p:extLst>
-              <p:ext uri="{386F3935-93C4-4BCD-93E2-E3B085C9AB24}">
-                <p16:designElem xmlns:p16="http://schemas.microsoft.com/office/powerpoint/2015/main" val="1"/>
-              </p:ext>
-            </p:extLst>
-          </p:nvPr>
-        </p:nvSpPr>
-        <p:spPr>
-          <a:xfrm>
-            <a:off x="2" y="0"/>
-            <a:ext cx="7004404" cy="6858000"/>
-          </a:xfrm>
-          <a:prstGeom prst="rect">
-            <a:avLst/>
-          </a:prstGeom>
-          <a:gradFill>
-            <a:gsLst>
-              <a:gs pos="58000">
-                <a:schemeClr val="tx1"/>
-              </a:gs>
-              <a:gs pos="33000">
-                <a:schemeClr val="tx1">
-                  <a:alpha val="64000"/>
-                </a:schemeClr>
-              </a:gs>
-              <a:gs pos="0">
-                <a:schemeClr val="tx1">
-                  <a:alpha val="0"/>
-                </a:schemeClr>
-              </a:gs>
-              <a:gs pos="100000">
-                <a:schemeClr val="tx1"/>
-              </a:gs>
-            </a:gsLst>
-            <a:lin ang="10800000" scaled="0"/>
-          </a:gradFill>
-          <a:ln>
-            <a:noFill/>
-          </a:ln>
-        </p:spPr>
-        <p:style>
-          <a:lnRef idx="2">
-            <a:schemeClr val="accent1">
-              <a:shade val="50000"/>
-            </a:schemeClr>
-          </a:lnRef>
-          <a:fillRef idx="1">
-            <a:schemeClr val="accent1"/>
-          </a:fillRef>
-          <a:effectRef idx="0">
-            <a:schemeClr val="accent1"/>
-          </a:effectRef>
-          <a:fontRef idx="minor">
-            <a:schemeClr val="lt1"/>
-          </a:fontRef>
-        </p:style>
-        <p:txBody>
-          <a:bodyPr rtlCol="0" anchor="ctr"/>
-          <a:lstStyle/>
-          <a:p>
-            <a:pPr algn="ctr"/>
-            <a:endParaRPr lang="en-US" dirty="0"/>
-          </a:p>
-        </p:txBody>
-      </p:sp>
-      <p:sp>
-        <p:nvSpPr>
-          <p:cNvPr id="3" name="Subtitle 2">
-            <a:extLst>
-              <a:ext uri="{FF2B5EF4-FFF2-40B4-BE49-F238E27FC236}">
-                <a16:creationId xmlns:a16="http://schemas.microsoft.com/office/drawing/2014/main" id="{F0FD9A51-1655-DF8C-52C5-2398AD7832C4}"/>
-              </a:ext>
-            </a:extLst>
-          </p:cNvPr>
-          <p:cNvSpPr>
-            <a:spLocks noGrp="1"/>
-          </p:cNvSpPr>
-          <p:nvPr>
-            <p:ph type="subTitle" idx="1"/>
-          </p:nvPr>
-        </p:nvSpPr>
-        <p:spPr>
-          <a:xfrm>
-            <a:off x="358485" y="4872922"/>
-            <a:ext cx="3017519" cy="1208141"/>
+            <a:off x="256374" y="230736"/>
+            <a:ext cx="8716710" cy="6264068"/>
           </a:xfrm>
         </p:spPr>
         <p:txBody>
           <a:bodyPr>
-            <a:normAutofit/>
+            <a:noAutofit/>
           </a:bodyPr>
           <a:lstStyle/>
           <a:p>
             <a:pPr algn="l"/>
-            <a:endParaRPr lang="en-US" sz="1700">
-              <a:solidFill>
-                <a:schemeClr val="bg1"/>
-              </a:solidFill>
-              <a:latin typeface="Avenir Medium" panose="02000503020000020003" pitchFamily="2" charset="0"/>
-              <a:ea typeface="Bodoni Ornaments" pitchFamily="2" charset="0"/>
-            </a:endParaRPr>
-          </a:p>
-          <a:p>
-            <a:pPr algn="l"/>
-            <a:r>
-              <a:rPr lang="en-US" sz="1700" i="1">
+            <a:r>
+              <a:rPr lang="en-US" sz="9600" dirty="0">
                 <a:solidFill>
                   <a:schemeClr val="bg1"/>
                 </a:solidFill>
-                <a:latin typeface="Avenir Oblique" panose="02000503020000020003" pitchFamily="2" charset="0"/>
+                <a:latin typeface="Avenir Medium" panose="02000503020000020003" pitchFamily="2" charset="0"/>
                 <a:ea typeface="Bodoni Ornaments" pitchFamily="2" charset="0"/>
               </a:rPr>
               <a:t>Goodness of God</a:t>
             </a:r>
           </a:p>
-          <a:p>
-            <a:pPr algn="l"/>
-            <a:endParaRPr lang="en-US" sz="1700">
-              <a:solidFill>
-                <a:schemeClr val="bg1"/>
-              </a:solidFill>
-              <a:latin typeface="Avenir Medium" panose="02000503020000020003" pitchFamily="2" charset="0"/>
-              <a:ea typeface="Bodoni Ornaments" pitchFamily="2" charset="0"/>
-            </a:endParaRPr>
-          </a:p>
-        </p:txBody>
-      </p:sp>
-      <p:sp>
-        <p:nvSpPr>
-          <p:cNvPr id="13" name="Rectangle 12">
-            <a:extLst>
-              <a:ext uri="{FF2B5EF4-FFF2-40B4-BE49-F238E27FC236}">
-                <a16:creationId xmlns:a16="http://schemas.microsoft.com/office/drawing/2014/main" id="{AF2F604E-43BE-4DC3-B983-E071523364F8}"/>
-              </a:ext>
-              <a:ext uri="{C183D7F6-B498-43B3-948B-1728B52AA6E4}">
-                <adec:decorative xmlns:adec="http://schemas.microsoft.com/office/drawing/2017/decorative" val="1"/>
-              </a:ext>
-            </a:extLst>
-          </p:cNvPr>
-          <p:cNvSpPr>
-            <a:spLocks noGrp="1" noRot="1" noChangeAspect="1" noMove="1" noResize="1" noEditPoints="1" noAdjustHandles="1" noChangeArrowheads="1" noChangeShapeType="1" noTextEdit="1"/>
-          </p:cNvSpPr>
-          <p:nvPr>
-            <p:extLst>
-              <p:ext uri="{386F3935-93C4-4BCD-93E2-E3B085C9AB24}">
-                <p16:designElem xmlns:p16="http://schemas.microsoft.com/office/powerpoint/2015/main" val="1"/>
-              </p:ext>
-            </p:extLst>
-          </p:nvPr>
-        </p:nvSpPr>
-        <p:spPr>
-          <a:xfrm rot="5400000">
-            <a:off x="551653" y="434802"/>
-            <a:ext cx="146304" cy="528066"/>
-          </a:xfrm>
-          <a:prstGeom prst="rect">
-            <a:avLst/>
-          </a:prstGeom>
-          <a:solidFill>
-            <a:schemeClr val="accent2"/>
-          </a:solidFill>
-          <a:ln>
-            <a:noFill/>
-          </a:ln>
-        </p:spPr>
-        <p:style>
-          <a:lnRef idx="2">
-            <a:schemeClr val="accent1">
-              <a:shade val="50000"/>
-            </a:schemeClr>
-          </a:lnRef>
-          <a:fillRef idx="1">
-            <a:schemeClr val="accent1"/>
-          </a:fillRef>
-          <a:effectRef idx="0">
-            <a:schemeClr val="accent1"/>
-          </a:effectRef>
-          <a:fontRef idx="minor">
-            <a:schemeClr val="lt1"/>
-          </a:fontRef>
-        </p:style>
-        <p:txBody>
-          <a:bodyPr rtlCol="0" anchor="ctr"/>
-          <a:lstStyle/>
-          <a:p>
-            <a:pPr algn="ctr"/>
-            <a:endParaRPr lang="en-US">
-              <a:solidFill>
-                <a:prstClr val="white"/>
-              </a:solidFill>
-              <a:latin typeface="Calibri" panose="020F0502020204030204"/>
-            </a:endParaRPr>
-          </a:p>
-        </p:txBody>
-      </p:sp>
-      <p:sp>
-        <p:nvSpPr>
-          <p:cNvPr id="15" name="Rectangle 14">
-            <a:extLst>
-              <a:ext uri="{FF2B5EF4-FFF2-40B4-BE49-F238E27FC236}">
-                <a16:creationId xmlns:a16="http://schemas.microsoft.com/office/drawing/2014/main" id="{08C9B587-E65E-4B52-B37C-ABEBB6E87928}"/>
-              </a:ext>
-              <a:ext uri="{C183D7F6-B498-43B3-948B-1728B52AA6E4}">
-                <adec:decorative xmlns:adec="http://schemas.microsoft.com/office/drawing/2017/decorative" val="1"/>
-              </a:ext>
-            </a:extLst>
-          </p:cNvPr>
-          <p:cNvSpPr>
-            <a:spLocks noGrp="1" noRot="1" noChangeAspect="1" noMove="1" noResize="1" noEditPoints="1" noAdjustHandles="1" noChangeArrowheads="1" noChangeShapeType="1" noTextEdit="1"/>
-          </p:cNvSpPr>
-          <p:nvPr>
-            <p:extLst>
-              <p:ext uri="{386F3935-93C4-4BCD-93E2-E3B085C9AB24}">
-                <p16:designElem xmlns:p16="http://schemas.microsoft.com/office/powerpoint/2015/main" val="1"/>
-              </p:ext>
-            </p:extLst>
-          </p:nvPr>
-        </p:nvSpPr>
-        <p:spPr>
-          <a:xfrm>
-            <a:off x="360771" y="4546920"/>
-            <a:ext cx="2983230" cy="18288"/>
-          </a:xfrm>
-          <a:prstGeom prst="rect">
-            <a:avLst/>
-          </a:prstGeom>
-          <a:solidFill>
-            <a:schemeClr val="tx1"/>
-          </a:solidFill>
-          <a:ln w="3175">
-            <a:noFill/>
-          </a:ln>
-          <a:effectLst/>
-        </p:spPr>
-        <p:style>
-          <a:lnRef idx="2">
-            <a:schemeClr val="accent1">
-              <a:shade val="50000"/>
-            </a:schemeClr>
-          </a:lnRef>
-          <a:fillRef idx="1">
-            <a:schemeClr val="accent1"/>
-          </a:fillRef>
-          <a:effectRef idx="0">
-            <a:schemeClr val="accent1"/>
-          </a:effectRef>
-          <a:fontRef idx="minor">
-            <a:schemeClr val="lt1"/>
-          </a:fontRef>
-        </p:style>
-        <p:txBody>
-          <a:bodyPr rtlCol="0" anchor="ctr"/>
-          <a:lstStyle/>
-          <a:p>
-            <a:pPr marL="0" marR="0" lvl="0" indent="0" algn="ctr" defTabSz="914400" rtl="0" eaLnBrk="1" fontAlgn="auto" latinLnBrk="0" hangingPunct="1">
-              <a:lnSpc>
-                <a:spcPct val="100000"/>
-              </a:lnSpc>
-              <a:spcBef>
-                <a:spcPts val="0"/>
-              </a:spcBef>
-              <a:spcAft>
-                <a:spcPts val="0"/>
-              </a:spcAft>
-              <a:buClrTx/>
-              <a:buSzTx/>
-              <a:buFontTx/>
-              <a:buNone/>
-              <a:tabLst/>
-              <a:defRPr/>
-            </a:pPr>
-            <a:endParaRPr kumimoji="0" lang="en-US" sz="1800" b="0" i="0" u="none" strike="noStrike" kern="1200" cap="none" spc="0" normalizeH="0" baseline="0" noProof="0">
-              <a:ln>
-                <a:noFill/>
-              </a:ln>
-              <a:solidFill>
-                <a:prstClr val="white"/>
-              </a:solidFill>
-              <a:effectLst/>
-              <a:uLnTx/>
-              <a:uFillTx/>
-              <a:latin typeface="Calibri" panose="020F0502020204030204"/>
-              <a:ea typeface="+mn-ea"/>
-              <a:cs typeface="+mn-cs"/>
-            </a:endParaRPr>
-          </a:p>
         </p:txBody>
       </p:sp>
     </p:spTree>
     <p:extLst>
       <p:ext uri="{BB962C8B-B14F-4D97-AF65-F5344CB8AC3E}">
-        <p14:creationId xmlns:p14="http://schemas.microsoft.com/office/powerpoint/2010/main" val="1606047208"/>
+        <p14:creationId xmlns:p14="http://schemas.microsoft.com/office/powerpoint/2010/main" val="2991002073"/>
       </p:ext>
     </p:extLst>
   </p:cSld>
@@ -3485,6 +3132,15 @@
               </a:rPr>
               <a:t>Your goodness is running after, it’s running after me</a:t>
             </a:r>
+          </a:p>
+          <a:p>
+            <a:endParaRPr lang="en-US" sz="4800" dirty="0">
+              <a:solidFill>
+                <a:schemeClr val="bg1"/>
+              </a:solidFill>
+              <a:latin typeface="Avenir Medium" panose="02000503020000020003" pitchFamily="2" charset="0"/>
+              <a:ea typeface="Bodoni Ornaments" pitchFamily="2" charset="0"/>
+            </a:endParaRPr>
           </a:p>
           <a:p>
             <a:r>
@@ -3667,7 +3323,7 @@
     <p:bg>
       <p:bgPr>
         <a:solidFill>
-          <a:srgbClr val="7030A0"/>
+          <a:schemeClr val="tx1"/>
         </a:solidFill>
         <a:effectLst/>
       </p:bgPr>
@@ -3806,7 +3462,7 @@
     <p:bg>
       <p:bgPr>
         <a:solidFill>
-          <a:srgbClr val="7030A0"/>
+          <a:schemeClr val="tx1"/>
         </a:solidFill>
         <a:effectLst/>
       </p:bgPr>
@@ -3926,6 +3582,45 @@
           </a:p>
         </p:txBody>
       </p:sp>
+      <p:sp>
+        <p:nvSpPr>
+          <p:cNvPr id="2" name="TextBox 1">
+            <a:extLst>
+              <a:ext uri="{FF2B5EF4-FFF2-40B4-BE49-F238E27FC236}">
+                <a16:creationId xmlns:a16="http://schemas.microsoft.com/office/drawing/2014/main" id="{CC82E41D-42A4-E133-7AFF-8DE1002677DB}"/>
+              </a:ext>
+            </a:extLst>
+          </p:cNvPr>
+          <p:cNvSpPr txBox="1"/>
+          <p:nvPr/>
+        </p:nvSpPr>
+        <p:spPr>
+          <a:xfrm>
+            <a:off x="7390614" y="6488668"/>
+            <a:ext cx="1753386" cy="369332"/>
+          </a:xfrm>
+          <a:prstGeom prst="rect">
+            <a:avLst/>
+          </a:prstGeom>
+          <a:noFill/>
+        </p:spPr>
+        <p:txBody>
+          <a:bodyPr wrap="square" rtlCol="0">
+            <a:spAutoFit/>
+          </a:bodyPr>
+          <a:lstStyle/>
+          <a:p>
+            <a:r>
+              <a:rPr lang="en-US" dirty="0">
+                <a:solidFill>
+                  <a:schemeClr val="bg1"/>
+                </a:solidFill>
+              </a:rPr>
+              <a:t>CCLI#7102397</a:t>
+            </a:r>
+          </a:p>
+        </p:txBody>
+      </p:sp>
     </p:spTree>
     <p:extLst>
       <p:ext uri="{BB962C8B-B14F-4D97-AF65-F5344CB8AC3E}">
@@ -3945,7 +3640,7 @@
     <p:bg>
       <p:bgPr>
         <a:solidFill>
-          <a:schemeClr val="accent1"/>
+          <a:schemeClr val="tx1"/>
         </a:solidFill>
         <a:effectLst/>
       </p:bgPr>
@@ -3955,7 +3650,7 @@
         <p:cNvPr id="1" name="">
           <a:extLst>
             <a:ext uri="{FF2B5EF4-FFF2-40B4-BE49-F238E27FC236}">
-              <a16:creationId xmlns:a16="http://schemas.microsoft.com/office/drawing/2014/main" id="{083E1F97-17F4-001F-7673-B8EFA09D831D}"/>
+              <a16:creationId xmlns:a16="http://schemas.microsoft.com/office/drawing/2014/main" id="{DAC03521-FD45-271B-60DA-096370003F08}"/>
             </a:ext>
           </a:extLst>
         </p:cNvPr>
@@ -3975,7 +3670,7 @@
           <p:cNvPr id="3" name="Subtitle 2">
             <a:extLst>
               <a:ext uri="{FF2B5EF4-FFF2-40B4-BE49-F238E27FC236}">
-                <a16:creationId xmlns:a16="http://schemas.microsoft.com/office/drawing/2014/main" id="{0F0AA937-867D-D484-37E8-C9B43A905917}"/>
+                <a16:creationId xmlns:a16="http://schemas.microsoft.com/office/drawing/2014/main" id="{CEB2EB5D-50E5-3E23-3DE7-0E4DE41F08FD}"/>
               </a:ext>
             </a:extLst>
           </p:cNvPr>
@@ -4068,7 +3763,7 @@
     </p:spTree>
     <p:extLst>
       <p:ext uri="{BB962C8B-B14F-4D97-AF65-F5344CB8AC3E}">
-        <p14:creationId xmlns:p14="http://schemas.microsoft.com/office/powerpoint/2010/main" val="2991002073"/>
+        <p14:creationId xmlns:p14="http://schemas.microsoft.com/office/powerpoint/2010/main" val="1990063030"/>
       </p:ext>
     </p:extLst>
   </p:cSld>
@@ -4084,7 +3779,7 @@
     <p:bg>
       <p:bgPr>
         <a:solidFill>
-          <a:schemeClr val="accent1"/>
+          <a:schemeClr val="tx1"/>
         </a:solidFill>
         <a:effectLst/>
       </p:bgPr>
@@ -4246,7 +3941,7 @@
     <p:bg>
       <p:bgPr>
         <a:solidFill>
-          <a:srgbClr val="7030A0"/>
+          <a:schemeClr val="tx1"/>
         </a:solidFill>
         <a:effectLst/>
       </p:bgPr>
@@ -4385,7 +4080,7 @@
     <p:bg>
       <p:bgPr>
         <a:solidFill>
-          <a:srgbClr val="7030A0"/>
+          <a:schemeClr val="tx1"/>
         </a:solidFill>
         <a:effectLst/>
       </p:bgPr>
@@ -4524,7 +4219,7 @@
     <p:bg>
       <p:bgPr>
         <a:solidFill>
-          <a:schemeClr val="accent1"/>
+          <a:schemeClr val="tx1"/>
         </a:solidFill>
         <a:effectLst/>
       </p:bgPr>
@@ -4639,7 +4334,7 @@
     <p:bg>
       <p:bgPr>
         <a:solidFill>
-          <a:schemeClr val="accent1"/>
+          <a:schemeClr val="tx1"/>
         </a:solidFill>
         <a:effectLst/>
       </p:bgPr>
@@ -4766,7 +4461,7 @@
     <p:bg>
       <p:bgPr>
         <a:solidFill>
-          <a:srgbClr val="7030A0"/>
+          <a:schemeClr val="tx1"/>
         </a:solidFill>
         <a:effectLst/>
       </p:bgPr>
@@ -4905,7 +4600,7 @@
     <p:bg>
       <p:bgPr>
         <a:solidFill>
-          <a:srgbClr val="7030A0"/>
+          <a:schemeClr val="tx1"/>
         </a:solidFill>
         <a:effectLst/>
       </p:bgPr>

--- a/Goodness of God.pptx
+++ b/Goodness of God.pptx
@@ -255,7 +255,7 @@
           <a:p>
             <a:fld id="{E759A0DE-F190-5444-87AC-4719D5F20D15}" type="datetimeFigureOut">
               <a:rPr lang="en-US" smtClean="0"/>
-              <a:t>6/6/26</a:t>
+              <a:t>7/4/26</a:t>
             </a:fld>
             <a:endParaRPr lang="en-US"/>
           </a:p>
@@ -425,7 +425,7 @@
           <a:p>
             <a:fld id="{E759A0DE-F190-5444-87AC-4719D5F20D15}" type="datetimeFigureOut">
               <a:rPr lang="en-US" smtClean="0"/>
-              <a:t>6/6/26</a:t>
+              <a:t>7/4/26</a:t>
             </a:fld>
             <a:endParaRPr lang="en-US"/>
           </a:p>
@@ -605,7 +605,7 @@
           <a:p>
             <a:fld id="{E759A0DE-F190-5444-87AC-4719D5F20D15}" type="datetimeFigureOut">
               <a:rPr lang="en-US" smtClean="0"/>
-              <a:t>6/6/26</a:t>
+              <a:t>7/4/26</a:t>
             </a:fld>
             <a:endParaRPr lang="en-US"/>
           </a:p>
@@ -775,7 +775,7 @@
           <a:p>
             <a:fld id="{E759A0DE-F190-5444-87AC-4719D5F20D15}" type="datetimeFigureOut">
               <a:rPr lang="en-US" smtClean="0"/>
-              <a:t>6/6/26</a:t>
+              <a:t>7/4/26</a:t>
             </a:fld>
             <a:endParaRPr lang="en-US"/>
           </a:p>
@@ -1021,7 +1021,7 @@
           <a:p>
             <a:fld id="{E759A0DE-F190-5444-87AC-4719D5F20D15}" type="datetimeFigureOut">
               <a:rPr lang="en-US" smtClean="0"/>
-              <a:t>6/6/26</a:t>
+              <a:t>7/4/26</a:t>
             </a:fld>
             <a:endParaRPr lang="en-US"/>
           </a:p>
@@ -1253,7 +1253,7 @@
           <a:p>
             <a:fld id="{E759A0DE-F190-5444-87AC-4719D5F20D15}" type="datetimeFigureOut">
               <a:rPr lang="en-US" smtClean="0"/>
-              <a:t>6/6/26</a:t>
+              <a:t>7/4/26</a:t>
             </a:fld>
             <a:endParaRPr lang="en-US"/>
           </a:p>
@@ -1620,7 +1620,7 @@
           <a:p>
             <a:fld id="{E759A0DE-F190-5444-87AC-4719D5F20D15}" type="datetimeFigureOut">
               <a:rPr lang="en-US" smtClean="0"/>
-              <a:t>6/6/26</a:t>
+              <a:t>7/4/26</a:t>
             </a:fld>
             <a:endParaRPr lang="en-US"/>
           </a:p>
@@ -1738,7 +1738,7 @@
           <a:p>
             <a:fld id="{E759A0DE-F190-5444-87AC-4719D5F20D15}" type="datetimeFigureOut">
               <a:rPr lang="en-US" smtClean="0"/>
-              <a:t>6/6/26</a:t>
+              <a:t>7/4/26</a:t>
             </a:fld>
             <a:endParaRPr lang="en-US"/>
           </a:p>
@@ -1833,7 +1833,7 @@
           <a:p>
             <a:fld id="{E759A0DE-F190-5444-87AC-4719D5F20D15}" type="datetimeFigureOut">
               <a:rPr lang="en-US" smtClean="0"/>
-              <a:t>6/6/26</a:t>
+              <a:t>7/4/26</a:t>
             </a:fld>
             <a:endParaRPr lang="en-US"/>
           </a:p>
@@ -2110,7 +2110,7 @@
           <a:p>
             <a:fld id="{E759A0DE-F190-5444-87AC-4719D5F20D15}" type="datetimeFigureOut">
               <a:rPr lang="en-US" smtClean="0"/>
-              <a:t>6/6/26</a:t>
+              <a:t>7/4/26</a:t>
             </a:fld>
             <a:endParaRPr lang="en-US"/>
           </a:p>
@@ -2367,7 +2367,7 @@
           <a:p>
             <a:fld id="{E759A0DE-F190-5444-87AC-4719D5F20D15}" type="datetimeFigureOut">
               <a:rPr lang="en-US" smtClean="0"/>
-              <a:t>6/6/26</a:t>
+              <a:t>7/4/26</a:t>
             </a:fld>
             <a:endParaRPr lang="en-US"/>
           </a:p>
@@ -2580,7 +2580,7 @@
           <a:p>
             <a:fld id="{E759A0DE-F190-5444-87AC-4719D5F20D15}" type="datetimeFigureOut">
               <a:rPr lang="en-US" smtClean="0"/>
-              <a:t>6/6/26</a:t>
+              <a:t>7/4/26</a:t>
             </a:fld>
             <a:endParaRPr lang="en-US"/>
           </a:p>
@@ -3582,45 +3582,6 @@
           </a:p>
         </p:txBody>
       </p:sp>
-      <p:sp>
-        <p:nvSpPr>
-          <p:cNvPr id="2" name="TextBox 1">
-            <a:extLst>
-              <a:ext uri="{FF2B5EF4-FFF2-40B4-BE49-F238E27FC236}">
-                <a16:creationId xmlns:a16="http://schemas.microsoft.com/office/drawing/2014/main" id="{CC82E41D-42A4-E133-7AFF-8DE1002677DB}"/>
-              </a:ext>
-            </a:extLst>
-          </p:cNvPr>
-          <p:cNvSpPr txBox="1"/>
-          <p:nvPr/>
-        </p:nvSpPr>
-        <p:spPr>
-          <a:xfrm>
-            <a:off x="7390614" y="6488668"/>
-            <a:ext cx="1753386" cy="369332"/>
-          </a:xfrm>
-          <a:prstGeom prst="rect">
-            <a:avLst/>
-          </a:prstGeom>
-          <a:noFill/>
-        </p:spPr>
-        <p:txBody>
-          <a:bodyPr wrap="square" rtlCol="0">
-            <a:spAutoFit/>
-          </a:bodyPr>
-          <a:lstStyle/>
-          <a:p>
-            <a:r>
-              <a:rPr lang="en-US" dirty="0">
-                <a:solidFill>
-                  <a:schemeClr val="bg1"/>
-                </a:solidFill>
-              </a:rPr>
-              <a:t>CCLI#7102397</a:t>
-            </a:r>
-          </a:p>
-        </p:txBody>
-      </p:sp>
     </p:spTree>
     <p:extLst>
       <p:ext uri="{BB962C8B-B14F-4D97-AF65-F5344CB8AC3E}">
